--- a/vibe-coding.pptx
+++ b/vibe-coding.pptx
@@ -9484,7 +9484,7 @@
           <a:p>
             <a:fld id="{3D94FAE1-E8DC-7E4F-8824-D6A393489AE1}" type="datetimeFigureOut">
               <a:rPr lang="en-TH" smtClean="0"/>
-              <a:t>22/7/2026 R</a:t>
+              <a:t>31/7/2026 R</a:t>
             </a:fld>
             <a:endParaRPr lang="en-TH"/>
           </a:p>
@@ -10049,6 +10049,90 @@
   <p:cSld>
     <p:spTree>
       <p:nvGrpSpPr>
+        <p:cNvPr id="1" name=""/>
+        <p:cNvGrpSpPr/>
+        <p:nvPr/>
+      </p:nvGrpSpPr>
+      <p:grpSpPr>
+        <a:xfrm>
+          <a:off x="0" y="0"/>
+          <a:ext cx="0" cy="0"/>
+          <a:chOff x="0" y="0"/>
+          <a:chExt cx="0" cy="0"/>
+        </a:xfrm>
+      </p:grpSpPr>
+      <p:sp>
+        <p:nvSpPr>
+          <p:cNvPr id="2" name="Slide Image Placeholder 1"/>
+          <p:cNvSpPr>
+            <a:spLocks noGrp="1" noRot="1" noChangeAspect="1"/>
+          </p:cNvSpPr>
+          <p:nvPr>
+            <p:ph type="sldImg"/>
+          </p:nvPr>
+        </p:nvSpPr>
+        <p:spPr/>
+      </p:sp>
+      <p:sp>
+        <p:nvSpPr>
+          <p:cNvPr id="3" name="Notes Placeholder 2"/>
+          <p:cNvSpPr>
+            <a:spLocks noGrp="1"/>
+          </p:cNvSpPr>
+          <p:nvPr>
+            <p:ph type="body" idx="1"/>
+          </p:nvPr>
+        </p:nvSpPr>
+        <p:spPr/>
+        <p:txBody>
+          <a:bodyPr/>
+          <a:lstStyle/>
+          <a:p>
+            <a:endParaRPr lang="en-TH" dirty="0"/>
+          </a:p>
+        </p:txBody>
+      </p:sp>
+      <p:sp>
+        <p:nvSpPr>
+          <p:cNvPr id="4" name="Slide Number Placeholder 3"/>
+          <p:cNvSpPr>
+            <a:spLocks noGrp="1"/>
+          </p:cNvSpPr>
+          <p:nvPr>
+            <p:ph type="sldNum" sz="quarter" idx="5"/>
+          </p:nvPr>
+        </p:nvSpPr>
+        <p:spPr/>
+        <p:txBody>
+          <a:bodyPr/>
+          <a:lstStyle/>
+          <a:p>
+            <a:fld id="{94C9B4EE-0463-D849-8EDA-71AC99A2A521}" type="slidenum">
+              <a:rPr lang="en-TH" smtClean="0"/>
+              <a:t>20</a:t>
+            </a:fld>
+            <a:endParaRPr lang="en-TH"/>
+          </a:p>
+        </p:txBody>
+      </p:sp>
+    </p:spTree>
+    <p:extLst>
+      <p:ext uri="{BB962C8B-B14F-4D97-AF65-F5344CB8AC3E}">
+        <p14:creationId xmlns:p14="http://schemas.microsoft.com/office/powerpoint/2010/main" val="789490675"/>
+      </p:ext>
+    </p:extLst>
+  </p:cSld>
+  <p:clrMapOvr>
+    <a:masterClrMapping/>
+  </p:clrMapOvr>
+</p:notes>
+</file>
+
+<file path=ppt/notesSlides/notesSlide5.xml><?xml version="1.0" encoding="utf-8"?>
+<p:notes xmlns:a="http://schemas.openxmlformats.org/drawingml/2006/main" xmlns:r="http://schemas.openxmlformats.org/officeDocument/2006/relationships" xmlns:p="http://schemas.openxmlformats.org/presentationml/2006/main">
+  <p:cSld>
+    <p:spTree>
+      <p:nvGrpSpPr>
         <p:cNvPr id="1" name="">
           <a:extLst>
             <a:ext uri="{FF2B5EF4-FFF2-40B4-BE49-F238E27FC236}">
@@ -10152,7 +10236,7 @@
 </p:notes>
 </file>
 
-<file path=ppt/notesSlides/notesSlide5.xml><?xml version="1.0" encoding="utf-8"?>
+<file path=ppt/notesSlides/notesSlide6.xml><?xml version="1.0" encoding="utf-8"?>
 <p:notes xmlns:a="http://schemas.openxmlformats.org/drawingml/2006/main" xmlns:r="http://schemas.openxmlformats.org/officeDocument/2006/relationships" xmlns:p="http://schemas.openxmlformats.org/presentationml/2006/main">
   <p:cSld>
     <p:spTree>
@@ -10260,7 +10344,7 @@
 </p:notes>
 </file>
 
-<file path=ppt/notesSlides/notesSlide6.xml><?xml version="1.0" encoding="utf-8"?>
+<file path=ppt/notesSlides/notesSlide7.xml><?xml version="1.0" encoding="utf-8"?>
 <p:notes xmlns:a="http://schemas.openxmlformats.org/drawingml/2006/main" xmlns:r="http://schemas.openxmlformats.org/officeDocument/2006/relationships" xmlns:p="http://schemas.openxmlformats.org/presentationml/2006/main">
   <p:cSld>
     <p:spTree>
@@ -10368,7 +10452,7 @@
 </p:notes>
 </file>
 
-<file path=ppt/notesSlides/notesSlide7.xml><?xml version="1.0" encoding="utf-8"?>
+<file path=ppt/notesSlides/notesSlide8.xml><?xml version="1.0" encoding="utf-8"?>
 <p:notes xmlns:a="http://schemas.openxmlformats.org/drawingml/2006/main" xmlns:r="http://schemas.openxmlformats.org/officeDocument/2006/relationships" xmlns:p="http://schemas.openxmlformats.org/presentationml/2006/main">
   <p:cSld>
     <p:spTree>
@@ -10456,7 +10540,7 @@
 </p:notes>
 </file>
 
-<file path=ppt/notesSlides/notesSlide8.xml><?xml version="1.0" encoding="utf-8"?>
+<file path=ppt/notesSlides/notesSlide9.xml><?xml version="1.0" encoding="utf-8"?>
 <p:notes xmlns:a="http://schemas.openxmlformats.org/drawingml/2006/main" xmlns:r="http://schemas.openxmlformats.org/officeDocument/2006/relationships" xmlns:p="http://schemas.openxmlformats.org/presentationml/2006/main">
   <p:cSld>
     <p:spTree>
@@ -10689,7 +10773,7 @@
           <a:p>
             <a:fld id="{DAA05DA8-D524-CE4A-B891-6E1FDCF55451}" type="datetime5">
               <a:rPr lang="en-US" smtClean="0"/>
-              <a:t>22-Jul-26</a:t>
+              <a:t>31-Jul-26</a:t>
             </a:fld>
             <a:endParaRPr lang="en-TH"/>
           </a:p>
@@ -10889,7 +10973,7 @@
           <a:p>
             <a:fld id="{EAD17B26-D4A6-FD43-9294-F1E6CDBAC3E3}" type="datetime5">
               <a:rPr lang="en-US" smtClean="0"/>
-              <a:t>22-Jul-26</a:t>
+              <a:t>31-Jul-26</a:t>
             </a:fld>
             <a:endParaRPr lang="en-TH"/>
           </a:p>
@@ -11099,7 +11183,7 @@
           <a:p>
             <a:fld id="{FD746268-285B-5246-9F47-C3506C68394D}" type="datetime5">
               <a:rPr lang="en-US" smtClean="0"/>
-              <a:t>22-Jul-26</a:t>
+              <a:t>31-Jul-26</a:t>
             </a:fld>
             <a:endParaRPr lang="en-TH"/>
           </a:p>
@@ -11334,7 +11418,7 @@
           <a:p>
             <a:fld id="{C125A8C8-41E1-3F49-8157-BA19C856F422}" type="datetime5">
               <a:rPr lang="en-US" smtClean="0"/>
-              <a:t>22-Jul-26</a:t>
+              <a:t>31-Jul-26</a:t>
             </a:fld>
             <a:endParaRPr lang="en-TH"/>
           </a:p>
@@ -11610,7 +11694,7 @@
           <a:p>
             <a:fld id="{6E244ED1-6194-6044-95D9-08F9AF0BB002}" type="datetime5">
               <a:rPr lang="en-US" smtClean="0"/>
-              <a:t>22-Jul-26</a:t>
+              <a:t>31-Jul-26</a:t>
             </a:fld>
             <a:endParaRPr lang="en-TH"/>
           </a:p>
@@ -11878,7 +11962,7 @@
           <a:p>
             <a:fld id="{88957159-C2DA-E847-B63B-0B6A3573D9EE}" type="datetime5">
               <a:rPr lang="en-US" smtClean="0"/>
-              <a:t>22-Jul-26</a:t>
+              <a:t>31-Jul-26</a:t>
             </a:fld>
             <a:endParaRPr lang="en-TH"/>
           </a:p>
@@ -12293,7 +12377,7 @@
           <a:p>
             <a:fld id="{D00EB01A-B309-4C4E-824D-C89DBE72E163}" type="datetime5">
               <a:rPr lang="en-US" smtClean="0"/>
-              <a:t>22-Jul-26</a:t>
+              <a:t>31-Jul-26</a:t>
             </a:fld>
             <a:endParaRPr lang="en-TH"/>
           </a:p>
@@ -12435,7 +12519,7 @@
           <a:p>
             <a:fld id="{21B903EB-DF9E-9845-B604-7AC7E76B8C89}" type="datetime5">
               <a:rPr lang="en-US" smtClean="0"/>
-              <a:t>22-Jul-26</a:t>
+              <a:t>31-Jul-26</a:t>
             </a:fld>
             <a:endParaRPr lang="en-TH"/>
           </a:p>
@@ -12548,7 +12632,7 @@
           <a:p>
             <a:fld id="{0A667FA2-DF18-0240-905A-4390229966F0}" type="datetime5">
               <a:rPr lang="en-US" smtClean="0"/>
-              <a:t>22-Jul-26</a:t>
+              <a:t>31-Jul-26</a:t>
             </a:fld>
             <a:endParaRPr lang="en-TH"/>
           </a:p>
@@ -12861,7 +12945,7 @@
           <a:p>
             <a:fld id="{C0F507D3-FC91-904B-8338-D7041F548BD0}" type="datetime5">
               <a:rPr lang="en-US" smtClean="0"/>
-              <a:t>22-Jul-26</a:t>
+              <a:t>31-Jul-26</a:t>
             </a:fld>
             <a:endParaRPr lang="en-TH"/>
           </a:p>
@@ -13150,7 +13234,7 @@
           <a:p>
             <a:fld id="{0E2F0D3D-E7F5-5847-8C6E-34E2FB05CDEB}" type="datetime5">
               <a:rPr lang="en-US" smtClean="0"/>
-              <a:t>22-Jul-26</a:t>
+              <a:t>31-Jul-26</a:t>
             </a:fld>
             <a:endParaRPr lang="en-TH"/>
           </a:p>
@@ -13393,7 +13477,7 @@
           <a:p>
             <a:fld id="{D28A85D6-0A4F-B045-8123-56B2F1CA6E7B}" type="datetime5">
               <a:rPr lang="en-US" smtClean="0"/>
-              <a:t>22-Jul-26</a:t>
+              <a:t>31-Jul-26</a:t>
             </a:fld>
             <a:endParaRPr lang="en-TH"/>
           </a:p>
@@ -14167,6 +14251,136 @@
           </a:p>
         </p:txBody>
       </p:sp>
+      <p:sp>
+        <p:nvSpPr>
+          <p:cNvPr id="2" name="TextBox 1">
+            <a:extLst>
+              <a:ext uri="{FF2B5EF4-FFF2-40B4-BE49-F238E27FC236}">
+                <a16:creationId xmlns:a16="http://schemas.microsoft.com/office/drawing/2014/main" id="{D26EE4E3-359A-9A57-D353-16D61522A847}"/>
+              </a:ext>
+            </a:extLst>
+          </p:cNvPr>
+          <p:cNvSpPr txBox="1"/>
+          <p:nvPr/>
+        </p:nvSpPr>
+        <p:spPr>
+          <a:xfrm>
+            <a:off x="1620672" y="5724009"/>
+            <a:ext cx="4475328" cy="369332"/>
+          </a:xfrm>
+          <a:prstGeom prst="rect">
+            <a:avLst/>
+          </a:prstGeom>
+          <a:noFill/>
+        </p:spPr>
+        <p:txBody>
+          <a:bodyPr wrap="none" rtlCol="0">
+            <a:spAutoFit/>
+          </a:bodyPr>
+          <a:lstStyle/>
+          <a:p>
+            <a:r>
+              <a:rPr lang="en-TH" dirty="0">
+                <a:solidFill>
+                  <a:schemeClr val="bg2"/>
+                </a:solidFill>
+              </a:rPr>
+              <a:t>Asst Prof Dr Naruemon Pratanwanich (Ploy)</a:t>
+            </a:r>
+          </a:p>
+        </p:txBody>
+      </p:sp>
+      <p:pic>
+        <p:nvPicPr>
+          <p:cNvPr id="7" name="Picture 6" descr="Math &amp; Comp Sci CU Alumni... - Math &amp; Comp Sci CU Alumni">
+            <a:extLst>
+              <a:ext uri="{FF2B5EF4-FFF2-40B4-BE49-F238E27FC236}">
+                <a16:creationId xmlns:a16="http://schemas.microsoft.com/office/drawing/2014/main" id="{E545F861-43D0-3C65-0896-955CC0ABA2E7}"/>
+              </a:ext>
+            </a:extLst>
+          </p:cNvPr>
+          <p:cNvPicPr>
+            <a:picLocks noChangeAspect="1"/>
+          </p:cNvPicPr>
+          <p:nvPr/>
+        </p:nvPicPr>
+        <p:blipFill rotWithShape="1">
+          <a:blip r:embed="rId3"/>
+          <a:srcRect t="18931" r="54038" b="15732"/>
+          <a:stretch>
+            <a:fillRect/>
+          </a:stretch>
+        </p:blipFill>
+        <p:spPr>
+          <a:xfrm>
+            <a:off x="7947420" y="5452408"/>
+            <a:ext cx="511232" cy="726730"/>
+          </a:xfrm>
+          <a:prstGeom prst="rect">
+            <a:avLst/>
+          </a:prstGeom>
+        </p:spPr>
+      </p:pic>
+      <p:pic>
+        <p:nvPicPr>
+          <p:cNvPr id="9" name="Picture 8">
+            <a:extLst>
+              <a:ext uri="{FF2B5EF4-FFF2-40B4-BE49-F238E27FC236}">
+                <a16:creationId xmlns:a16="http://schemas.microsoft.com/office/drawing/2014/main" id="{01C3729C-47DD-6A27-423E-8EE672CC9C41}"/>
+              </a:ext>
+            </a:extLst>
+          </p:cNvPr>
+          <p:cNvPicPr>
+            <a:picLocks noChangeAspect="1"/>
+          </p:cNvPicPr>
+          <p:nvPr/>
+        </p:nvPicPr>
+        <p:blipFill>
+          <a:blip r:embed="rId4"/>
+          <a:stretch>
+            <a:fillRect/>
+          </a:stretch>
+        </p:blipFill>
+        <p:spPr>
+          <a:xfrm>
+            <a:off x="8331908" y="5356771"/>
+            <a:ext cx="2789506" cy="822366"/>
+          </a:xfrm>
+          <a:prstGeom prst="rect">
+            <a:avLst/>
+          </a:prstGeom>
+        </p:spPr>
+      </p:pic>
+      <p:pic>
+        <p:nvPicPr>
+          <p:cNvPr id="11" name="Picture 10" descr="logo-main-768x200">
+            <a:extLst>
+              <a:ext uri="{FF2B5EF4-FFF2-40B4-BE49-F238E27FC236}">
+                <a16:creationId xmlns:a16="http://schemas.microsoft.com/office/drawing/2014/main" id="{EB9044A1-6BB5-3B8B-5F3D-D1532A661734}"/>
+              </a:ext>
+            </a:extLst>
+          </p:cNvPr>
+          <p:cNvPicPr>
+            <a:picLocks noChangeAspect="1"/>
+          </p:cNvPicPr>
+          <p:nvPr/>
+        </p:nvPicPr>
+        <p:blipFill>
+          <a:blip r:embed="rId5"/>
+          <a:stretch>
+            <a:fillRect/>
+          </a:stretch>
+        </p:blipFill>
+        <p:spPr>
+          <a:xfrm>
+            <a:off x="853613" y="343811"/>
+            <a:ext cx="1469858" cy="378897"/>
+          </a:xfrm>
+          <a:prstGeom prst="rect">
+            <a:avLst/>
+          </a:prstGeom>
+        </p:spPr>
+      </p:pic>
     </p:spTree>
     <p:extLst>
       <p:ext uri="{BB962C8B-B14F-4D97-AF65-F5344CB8AC3E}">
@@ -14320,7 +14534,7 @@
           <a:p>
             <a:fld id="{128BA690-362C-854E-857D-6186A02EAD2A}" type="datetime5">
               <a:rPr lang="en-US" smtClean="0"/>
-              <a:t>22-Jul-26</a:t>
+              <a:t>31-Jul-26</a:t>
             </a:fld>
             <a:endParaRPr lang="en-TH"/>
           </a:p>
@@ -14505,7 +14719,7 @@
           <a:p>
             <a:fld id="{049C8197-1826-1140-A5A7-6E043C1C065B}" type="datetime5">
               <a:rPr lang="en-US" smtClean="0"/>
-              <a:t>22-Jul-26</a:t>
+              <a:t>31-Jul-26</a:t>
             </a:fld>
             <a:endParaRPr lang="en-TH"/>
           </a:p>
@@ -14649,7 +14863,7 @@
           <a:p>
             <a:fld id="{51BF4377-FC03-6540-B5A0-2268A66B5E70}" type="datetime5">
               <a:rPr lang="en-US" smtClean="0"/>
-              <a:t>22-Jul-26</a:t>
+              <a:t>31-Jul-26</a:t>
             </a:fld>
             <a:endParaRPr lang="en-TH"/>
           </a:p>
@@ -14846,7 +15060,7 @@
           <a:p>
             <a:fld id="{D81286D0-5AE9-9A43-BA0F-68F64E789304}" type="datetime5">
               <a:rPr lang="en-US" smtClean="0"/>
-              <a:t>22-Jul-26</a:t>
+              <a:t>31-Jul-26</a:t>
             </a:fld>
             <a:endParaRPr lang="en-TH"/>
           </a:p>
@@ -15472,7 +15686,7 @@
           <a:p>
             <a:fld id="{0C969973-5C72-6E49-B464-E3A83DEA07A8}" type="datetime5">
               <a:rPr lang="en-US" smtClean="0"/>
-              <a:t>22-Jul-26</a:t>
+              <a:t>1-Aug-26</a:t>
             </a:fld>
             <a:endParaRPr lang="en-TH"/>
           </a:p>
@@ -16206,7 +16420,7 @@
           <a:p>
             <a:fld id="{61405856-713D-0848-A0CF-DAA5FA96FDAC}" type="datetime5">
               <a:rPr lang="en-US" smtClean="0"/>
-              <a:t>22-Jul-26</a:t>
+              <a:t>31-Jul-26</a:t>
             </a:fld>
             <a:endParaRPr lang="en-TH"/>
           </a:p>
@@ -16448,7 +16662,7 @@
           <a:p>
             <a:fld id="{2ABDDF30-3BD8-AE47-A7CD-1D0B31BCB59B}" type="datetime5">
               <a:rPr lang="en-US" smtClean="0"/>
-              <a:t>22-Jul-26</a:t>
+              <a:t>31-Jul-26</a:t>
             </a:fld>
             <a:endParaRPr lang="en-TH"/>
           </a:p>
@@ -16736,7 +16950,7 @@
           <a:p>
             <a:fld id="{A27EFEB9-165F-FF4A-8488-93DC54076E89}" type="datetime5">
               <a:rPr lang="en-US" smtClean="0"/>
-              <a:t>22-Jul-26</a:t>
+              <a:t>31-Jul-26</a:t>
             </a:fld>
             <a:endParaRPr lang="en-TH"/>
           </a:p>
@@ -17555,7 +17769,7 @@
           <a:p>
             <a:fld id="{4B967DE9-3B41-8F48-A944-A2E7E8714E2F}" type="datetime5">
               <a:rPr lang="en-US" smtClean="0"/>
-              <a:t>22-Jul-26</a:t>
+              <a:t>31-Jul-26</a:t>
             </a:fld>
             <a:endParaRPr lang="en-TH"/>
           </a:p>
@@ -17979,7 +18193,7 @@
           <a:p>
             <a:fld id="{93F60EE9-2C29-CA40-B676-15CC1CFE547A}" type="datetime5">
               <a:rPr lang="en-US" smtClean="0"/>
-              <a:t>22-Jul-26</a:t>
+              <a:t>31-Jul-26</a:t>
             </a:fld>
             <a:endParaRPr lang="en-TH"/>
           </a:p>
@@ -18178,28 +18392,14 @@
           <a:p>
             <a:pPr algn="ctr"/>
             <a:r>
-              <a:rPr lang="en-US" dirty="0">
-                <a:solidFill>
-                  <a:srgbClr val="FFFFFF"/>
-                </a:solidFill>
-              </a:rPr>
-              <a:t>Vibe code the program </a:t>
-            </a:r>
-            <a:br>
-              <a:rPr lang="en-US" dirty="0">
-                <a:solidFill>
-                  <a:srgbClr val="FFFFFF"/>
-                </a:solidFill>
-              </a:rPr>
-            </a:br>
-            <a:r>
-              <a:rPr lang="en-US" dirty="0">
-                <a:solidFill>
-                  <a:srgbClr val="FFFFFF"/>
-                </a:solidFill>
-              </a:rPr>
-              <a:t>I will show you now</a:t>
-            </a:r>
+              <a:rPr lang="en-TH" dirty="0"/>
+              <a:t>Build a Diabetes Risk Scoring System </a:t>
+            </a:r>
+            <a:endParaRPr lang="en-US" dirty="0">
+              <a:solidFill>
+                <a:srgbClr val="FFFFFF"/>
+              </a:solidFill>
+            </a:endParaRPr>
           </a:p>
         </p:txBody>
       </p:sp>
@@ -18232,9 +18432,44 @@
           <a:lstStyle/>
           <a:p>
             <a:pPr algn="ctr"/>
+            <a:r>
+              <a:rPr lang="en-TH" b="1" dirty="0">
+                <a:solidFill>
+                  <a:srgbClr val="FF91ED"/>
+                </a:solidFill>
+              </a:rPr>
+              <a:t>Challenge: </a:t>
+            </a:r>
+            <a:r>
+              <a:rPr lang="en-TH" dirty="0">
+                <a:solidFill>
+                  <a:srgbClr val="FF91ED"/>
+                </a:solidFill>
+              </a:rPr>
+              <a:t>Vibe Code in </a:t>
+            </a:r>
+            <a:r>
+              <a:rPr lang="en-TH" b="1" dirty="0">
+                <a:solidFill>
+                  <a:srgbClr val="FF91ED"/>
+                </a:solidFill>
+              </a:rPr>
+              <a:t>15 minutes</a:t>
+            </a:r>
+          </a:p>
+          <a:p>
+            <a:pPr algn="ctr"/>
+            <a:r>
+              <a:rPr lang="en-TH" dirty="0">
+                <a:solidFill>
+                  <a:srgbClr val="FCD673"/>
+                </a:solidFill>
+              </a:rPr>
+              <a:t>No framework. No planning. Just prompt the AI and build.</a:t>
+            </a:r>
             <a:endParaRPr lang="en-US" dirty="0">
               <a:solidFill>
-                <a:srgbClr val="FFFFFF"/>
+                <a:srgbClr val="FCD673"/>
               </a:solidFill>
             </a:endParaRPr>
           </a:p>
@@ -18263,7 +18498,7 @@
           <a:p>
             <a:fld id="{DB805A4E-ACEF-D348-A5AF-76D0842C49FF}" type="datetime5">
               <a:rPr lang="en-US" smtClean="0"/>
-              <a:t>22-Jul-26</a:t>
+              <a:t>1-Aug-26</a:t>
             </a:fld>
             <a:endParaRPr lang="en-TH"/>
           </a:p>
@@ -18610,7 +18845,7 @@
           <a:p>
             <a:fld id="{1596D758-1C55-8A47-BB85-0B96A633A786}" type="datetime5">
               <a:rPr lang="en-US" smtClean="0"/>
-              <a:t>22-Jul-26</a:t>
+              <a:t>31-Jul-26</a:t>
             </a:fld>
             <a:endParaRPr lang="en-TH"/>
           </a:p>
@@ -18642,6 +18877,68 @@
               <a:t>20</a:t>
             </a:fld>
             <a:endParaRPr lang="en-TH"/>
+          </a:p>
+        </p:txBody>
+      </p:sp>
+      <p:sp>
+        <p:nvSpPr>
+          <p:cNvPr id="6" name="Cloud Callout 5">
+            <a:extLst>
+              <a:ext uri="{FF2B5EF4-FFF2-40B4-BE49-F238E27FC236}">
+                <a16:creationId xmlns:a16="http://schemas.microsoft.com/office/drawing/2014/main" id="{224C4C73-B704-A62A-D941-495342EFE883}"/>
+              </a:ext>
+            </a:extLst>
+          </p:cNvPr>
+          <p:cNvSpPr/>
+          <p:nvPr/>
+        </p:nvSpPr>
+        <p:spPr>
+          <a:xfrm>
+            <a:off x="3026764" y="5548495"/>
+            <a:ext cx="2364698" cy="944380"/>
+          </a:xfrm>
+          <a:prstGeom prst="cloudCallout">
+            <a:avLst>
+              <a:gd name="adj1" fmla="val -73215"/>
+              <a:gd name="adj2" fmla="val -68085"/>
+            </a:avLst>
+          </a:prstGeom>
+          <a:solidFill>
+            <a:srgbClr val="FFEBFF"/>
+          </a:solidFill>
+          <a:ln>
+            <a:noFill/>
+          </a:ln>
+        </p:spPr>
+        <p:style>
+          <a:lnRef idx="2">
+            <a:schemeClr val="accent1">
+              <a:shade val="15000"/>
+            </a:schemeClr>
+          </a:lnRef>
+          <a:fillRef idx="1">
+            <a:schemeClr val="accent1"/>
+          </a:fillRef>
+          <a:effectRef idx="0">
+            <a:schemeClr val="accent1"/>
+          </a:effectRef>
+          <a:fontRef idx="minor">
+            <a:schemeClr val="lt1"/>
+          </a:fontRef>
+        </p:style>
+        <p:txBody>
+          <a:bodyPr rtlCol="0" anchor="ctr"/>
+          <a:lstStyle/>
+          <a:p>
+            <a:pPr algn="ctr"/>
+            <a:r>
+              <a:rPr lang="en-TH" sz="1600" dirty="0">
+                <a:solidFill>
+                  <a:srgbClr val="0070C0"/>
+                </a:solidFill>
+              </a:rPr>
+              <a:t>Any further improvements?</a:t>
+            </a:r>
           </a:p>
         </p:txBody>
       </p:sp>
@@ -18787,7 +19084,7 @@
           <a:p>
             <a:fld id="{118FACC3-9D59-B24B-A7D9-08A7150D1213}" type="datetime5">
               <a:rPr lang="en-US" smtClean="0"/>
-              <a:t>22-Jul-26</a:t>
+              <a:t>31-Jul-26</a:t>
             </a:fld>
             <a:endParaRPr lang="en-TH"/>
           </a:p>
@@ -19046,7 +19343,7 @@
                   <a:schemeClr val="tx1"/>
                 </a:solidFill>
               </a:rPr>
-              <a:t> Prompt AI to generate a structured Technical Design Document (TDD) that explains the codebase, enabling easier review, understanding, and verification.</a:t>
+              <a:t> Verify AI-generated code using structured Technical Design Documents (TDDs) generated via AI prompts.</a:t>
             </a:r>
           </a:p>
         </p:txBody>
@@ -19569,7 +19866,7 @@
           <a:p>
             <a:fld id="{5D3FF671-393D-8E4C-B942-22BD5A907043}" type="datetime5">
               <a:rPr lang="en-US" smtClean="0"/>
-              <a:t>22-Jul-26</a:t>
+              <a:t>31-Jul-26</a:t>
             </a:fld>
             <a:endParaRPr lang="en-TH"/>
           </a:p>
@@ -20093,7 +20390,7 @@
           <a:p>
             <a:fld id="{C125A8C8-41E1-3F49-8157-BA19C856F422}" type="datetime5">
               <a:rPr lang="en-US" smtClean="0"/>
-              <a:t>22-Jul-26</a:t>
+              <a:t>31-Jul-26</a:t>
             </a:fld>
             <a:endParaRPr lang="en-TH"/>
           </a:p>
@@ -20684,7 +20981,7 @@
           <a:p>
             <a:fld id="{C125A8C8-41E1-3F49-8157-BA19C856F422}" type="datetime5">
               <a:rPr lang="en-US" smtClean="0"/>
-              <a:t>22-Jul-26</a:t>
+              <a:t>31-Jul-26</a:t>
             </a:fld>
             <a:endParaRPr lang="en-TH"/>
           </a:p>
@@ -21487,7 +21784,7 @@
           <a:p>
             <a:fld id="{C125A8C8-41E1-3F49-8157-BA19C856F422}" type="datetime5">
               <a:rPr lang="en-US" smtClean="0"/>
-              <a:t>22-Jul-26</a:t>
+              <a:t>31-Jul-26</a:t>
             </a:fld>
             <a:endParaRPr lang="en-TH"/>
           </a:p>
@@ -21648,7 +21945,7 @@
           <a:p>
             <a:fld id="{C125A8C8-41E1-3F49-8157-BA19C856F422}" type="datetime5">
               <a:rPr lang="en-US" smtClean="0"/>
-              <a:t>22-Jul-26</a:t>
+              <a:t>31-Jul-26</a:t>
             </a:fld>
             <a:endParaRPr lang="en-TH"/>
           </a:p>
@@ -21938,7 +22235,7 @@
                 <a:tabLst/>
                 <a:defRPr/>
               </a:pPr>
-              <a:t>22-Jul-26</a:t>
+              <a:t>31-Jul-26</a:t>
             </a:fld>
             <a:endParaRPr kumimoji="0" lang="en-TH" sz="1200" b="0" i="0" u="none" strike="noStrike" kern="1200" cap="none" spc="0" normalizeH="0" baseline="0" noProof="0">
               <a:ln>
@@ -22632,7 +22929,7 @@
           <a:p>
             <a:fld id="{801942C5-6C03-E540-B137-26EA799F3E37}" type="datetime5">
               <a:rPr lang="en-US" smtClean="0"/>
-              <a:t>22-Jul-26</a:t>
+              <a:t>31-Jul-26</a:t>
             </a:fld>
             <a:endParaRPr lang="en-TH"/>
           </a:p>
@@ -23396,7 +23693,7 @@
           <a:p>
             <a:fld id="{721DDF4D-4288-2748-8EC0-6BF67AA2AD84}" type="datetime5">
               <a:rPr lang="en-US" smtClean="0"/>
-              <a:t>22-Jul-26</a:t>
+              <a:t>31-Jul-26</a:t>
             </a:fld>
             <a:endParaRPr lang="en-TH"/>
           </a:p>
@@ -24136,7 +24433,7 @@
           <a:p>
             <a:fld id="{B27253AE-FBB0-5044-B6C9-162D75F4694D}" type="datetime5">
               <a:rPr lang="en-US" smtClean="0"/>
-              <a:t>22-Jul-26</a:t>
+              <a:t>1-Aug-26</a:t>
             </a:fld>
             <a:endParaRPr lang="en-TH"/>
           </a:p>
@@ -24314,7 +24611,7 @@
           <a:p>
             <a:fld id="{1A1C45A9-CE11-A64B-B2BE-A621D07D8FF2}" type="datetime5">
               <a:rPr lang="en-US" smtClean="0"/>
-              <a:t>22-Jul-26</a:t>
+              <a:t>31-Jul-26</a:t>
             </a:fld>
             <a:endParaRPr lang="en-TH"/>
           </a:p>
@@ -25121,7 +25418,7 @@
           <a:p>
             <a:fld id="{0974C0BC-5418-3B45-B654-F9518862E612}" type="datetime5">
               <a:rPr lang="en-US" smtClean="0"/>
-              <a:t>22-Jul-26</a:t>
+              <a:t>31-Jul-26</a:t>
             </a:fld>
             <a:endParaRPr lang="en-TH"/>
           </a:p>
@@ -25469,7 +25766,7 @@
           <a:p>
             <a:fld id="{0A2B2C85-0F29-8141-824D-B64139D3E644}" type="datetime5">
               <a:rPr lang="en-US" smtClean="0"/>
-              <a:t>22-Jul-26</a:t>
+              <a:t>31-Jul-26</a:t>
             </a:fld>
             <a:endParaRPr lang="en-TH"/>
           </a:p>
@@ -25749,7 +26046,7 @@
           <a:p>
             <a:fld id="{A01A5310-2BF5-E94D-8D29-E42AB53A1A8A}" type="datetime5">
               <a:rPr lang="en-US" smtClean="0"/>
-              <a:t>22-Jul-26</a:t>
+              <a:t>31-Jul-26</a:t>
             </a:fld>
             <a:endParaRPr lang="en-TH"/>
           </a:p>
@@ -25989,7 +26286,7 @@
           <a:p>
             <a:fld id="{3C99A2BC-133C-5447-A0CD-89BA58838AD6}" type="datetime5">
               <a:rPr lang="en-US" smtClean="0"/>
-              <a:t>22-Jul-26</a:t>
+              <a:t>31-Jul-26</a:t>
             </a:fld>
             <a:endParaRPr lang="en-TH"/>
           </a:p>
@@ -26171,7 +26468,7 @@
           <a:p>
             <a:fld id="{DA0D2F6F-B8A3-A543-AFF8-39BA7C8BFA72}" type="datetime5">
               <a:rPr lang="en-US" smtClean="0"/>
-              <a:t>22-Jul-26</a:t>
+              <a:t>31-Jul-26</a:t>
             </a:fld>
             <a:endParaRPr lang="en-TH"/>
           </a:p>
@@ -27769,7 +28066,7 @@
           <a:p>
             <a:fld id="{DBFA31FC-7BAD-134B-A3C2-C7FB5851CE01}" type="datetime5">
               <a:rPr lang="en-US" smtClean="0"/>
-              <a:t>22-Jul-26</a:t>
+              <a:t>31-Jul-26</a:t>
             </a:fld>
             <a:endParaRPr lang="en-TH"/>
           </a:p>
@@ -27954,7 +28251,7 @@
           <a:p>
             <a:fld id="{0D08CCF7-BE93-E34B-9812-8612FF4EA911}" type="datetime5">
               <a:rPr lang="en-US" smtClean="0"/>
-              <a:t>22-Jul-26</a:t>
+              <a:t>31-Jul-26</a:t>
             </a:fld>
             <a:endParaRPr lang="en-TH"/>
           </a:p>
@@ -28192,7 +28489,7 @@
           <a:p>
             <a:fld id="{30FA1ED7-ED8B-8E45-B575-28074C122089}" type="datetime5">
               <a:rPr lang="en-US" smtClean="0"/>
-              <a:t>22-Jul-26</a:t>
+              <a:t>31-Jul-26</a:t>
             </a:fld>
             <a:endParaRPr lang="en-TH"/>
           </a:p>
@@ -28546,7 +28843,7 @@
           <a:p>
             <a:fld id="{ED4F0C4D-1318-794C-8957-C38E1202F872}" type="datetime5">
               <a:rPr lang="en-US" smtClean="0"/>
-              <a:t>22-Jul-26</a:t>
+              <a:t>31-Jul-26</a:t>
             </a:fld>
             <a:endParaRPr lang="en-TH"/>
           </a:p>
@@ -29160,7 +29457,7 @@
           <a:p>
             <a:fld id="{4C0369BB-EC29-B346-A675-28B9A8180014}" type="datetime5">
               <a:rPr lang="en-US" smtClean="0"/>
-              <a:t>22-Jul-26</a:t>
+              <a:t>1-Aug-26</a:t>
             </a:fld>
             <a:endParaRPr lang="en-TH"/>
           </a:p>
@@ -29248,7 +29545,7 @@
           <a:p>
             <a:fld id="{4C6783B1-58B3-6C48-B896-DAFAECFBF28C}" type="datetime5">
               <a:rPr lang="en-US" smtClean="0"/>
-              <a:t>22-Jul-26</a:t>
+              <a:t>1-Aug-26</a:t>
             </a:fld>
             <a:endParaRPr lang="en-TH"/>
           </a:p>
@@ -31495,7 +31792,7 @@
           <a:p>
             <a:fld id="{BE84D1C2-DEDA-7A41-89F1-5B549FDF1F7E}" type="datetime5">
               <a:rPr lang="en-US" smtClean="0"/>
-              <a:t>22-Jul-26</a:t>
+              <a:t>1-Aug-26</a:t>
             </a:fld>
             <a:endParaRPr lang="en-TH"/>
           </a:p>
@@ -34460,7 +34757,7 @@
           <a:p>
             <a:fld id="{C2B0D90B-6EFE-E046-8F39-1495C1DEF19C}" type="datetime5">
               <a:rPr lang="en-US" smtClean="0"/>
-              <a:t>22-Jul-26</a:t>
+              <a:t>1-Aug-26</a:t>
             </a:fld>
             <a:endParaRPr lang="en-TH"/>
           </a:p>
@@ -36612,7 +36909,7 @@
           <a:p>
             <a:fld id="{8634FB73-7407-0748-BFD3-AF84AFFB1E2B}" type="datetime5">
               <a:rPr lang="en-US" smtClean="0"/>
-              <a:t>22-Jul-26</a:t>
+              <a:t>1-Aug-26</a:t>
             </a:fld>
             <a:endParaRPr lang="en-TH"/>
           </a:p>
@@ -36884,7 +37181,7 @@
           <a:p>
             <a:fld id="{33EF8B4B-1739-904A-ADC0-0D3D3A8B4A14}" type="datetime5">
               <a:rPr lang="en-US" smtClean="0"/>
-              <a:t>22-Jul-26</a:t>
+              <a:t>1-Aug-26</a:t>
             </a:fld>
             <a:endParaRPr lang="en-TH"/>
           </a:p>

--- a/vibe-coding.pptx
+++ b/vibe-coding.pptx
@@ -3414,10 +3414,10 @@
       <dgm:prSet presAssocID="{F90DF42E-6420-D744-BABE-C79234DD4B9A}" presName="imagNode" presStyleLbl="fgImgPlace1" presStyleIdx="0" presStyleCnt="3"/>
       <dgm:spPr>
         <a:blipFill>
-          <a:blip xmlns:r="http://schemas.openxmlformats.org/officeDocument/2006/relationships">
+          <a:blip xmlns:r="http://schemas.openxmlformats.org/officeDocument/2006/relationships" r:embed="rId1">
             <a:extLst>
               <a:ext uri="{96DAC541-7B7A-43D3-8B79-37D633B846F1}">
-                <asvg:svgBlip xmlns:asvg="http://schemas.microsoft.com/office/drawing/2016/SVG/main" r:embed="rId1"/>
+                <asvg:svgBlip xmlns:asvg="http://schemas.microsoft.com/office/drawing/2016/SVG/main" r:embed="rId2"/>
               </a:ext>
             </a:extLst>
           </a:blip>
@@ -3457,10 +3457,10 @@
       <dgm:prSet presAssocID="{10FEC18E-A499-DE47-82FE-7EA6FE9B7ACE}" presName="imagNode" presStyleLbl="fgImgPlace1" presStyleIdx="1" presStyleCnt="3"/>
       <dgm:spPr>
         <a:blipFill>
-          <a:blip xmlns:r="http://schemas.openxmlformats.org/officeDocument/2006/relationships">
+          <a:blip xmlns:r="http://schemas.openxmlformats.org/officeDocument/2006/relationships" r:embed="rId3">
             <a:extLst>
               <a:ext uri="{96DAC541-7B7A-43D3-8B79-37D633B846F1}">
-                <asvg:svgBlip xmlns:asvg="http://schemas.microsoft.com/office/drawing/2016/SVG/main" r:embed="rId2"/>
+                <asvg:svgBlip xmlns:asvg="http://schemas.microsoft.com/office/drawing/2016/SVG/main" r:embed="rId4"/>
               </a:ext>
             </a:extLst>
           </a:blip>
@@ -3500,10 +3500,10 @@
       <dgm:prSet presAssocID="{DFEDCDBE-A354-3B40-8E0E-39D16E0DA81C}" presName="imagNode" presStyleLbl="fgImgPlace1" presStyleIdx="2" presStyleCnt="3"/>
       <dgm:spPr>
         <a:blipFill>
-          <a:blip xmlns:r="http://schemas.openxmlformats.org/officeDocument/2006/relationships">
+          <a:blip xmlns:r="http://schemas.openxmlformats.org/officeDocument/2006/relationships" r:embed="rId5">
             <a:extLst>
               <a:ext uri="{96DAC541-7B7A-43D3-8B79-37D633B846F1}">
-                <asvg:svgBlip xmlns:asvg="http://schemas.microsoft.com/office/drawing/2016/SVG/main" r:embed="rId3"/>
+                <asvg:svgBlip xmlns:asvg="http://schemas.microsoft.com/office/drawing/2016/SVG/main" r:embed="rId6"/>
               </a:ext>
             </a:extLst>
           </a:blip>
@@ -3722,10 +3722,10 @@
       <dgm:prSet presAssocID="{F90DF42E-6420-D744-BABE-C79234DD4B9A}" presName="imagNode" presStyleLbl="fgImgPlace1" presStyleIdx="0" presStyleCnt="3"/>
       <dgm:spPr>
         <a:blipFill>
-          <a:blip xmlns:r="http://schemas.openxmlformats.org/officeDocument/2006/relationships">
+          <a:blip xmlns:r="http://schemas.openxmlformats.org/officeDocument/2006/relationships" r:embed="rId1">
             <a:extLst>
               <a:ext uri="{96DAC541-7B7A-43D3-8B79-37D633B846F1}">
-                <asvg:svgBlip xmlns:asvg="http://schemas.microsoft.com/office/drawing/2016/SVG/main" r:embed="rId1"/>
+                <asvg:svgBlip xmlns:asvg="http://schemas.microsoft.com/office/drawing/2016/SVG/main" r:embed="rId2"/>
               </a:ext>
             </a:extLst>
           </a:blip>
@@ -3765,10 +3765,10 @@
       <dgm:prSet presAssocID="{10FEC18E-A499-DE47-82FE-7EA6FE9B7ACE}" presName="imagNode" presStyleLbl="fgImgPlace1" presStyleIdx="1" presStyleCnt="3"/>
       <dgm:spPr>
         <a:blipFill>
-          <a:blip xmlns:r="http://schemas.openxmlformats.org/officeDocument/2006/relationships">
+          <a:blip xmlns:r="http://schemas.openxmlformats.org/officeDocument/2006/relationships" r:embed="rId3">
             <a:extLst>
               <a:ext uri="{96DAC541-7B7A-43D3-8B79-37D633B846F1}">
-                <asvg:svgBlip xmlns:asvg="http://schemas.microsoft.com/office/drawing/2016/SVG/main" r:embed="rId2"/>
+                <asvg:svgBlip xmlns:asvg="http://schemas.microsoft.com/office/drawing/2016/SVG/main" r:embed="rId4"/>
               </a:ext>
             </a:extLst>
           </a:blip>
@@ -3808,10 +3808,10 @@
       <dgm:prSet presAssocID="{DFEDCDBE-A354-3B40-8E0E-39D16E0DA81C}" presName="imagNode" presStyleLbl="fgImgPlace1" presStyleIdx="2" presStyleCnt="3"/>
       <dgm:spPr>
         <a:blipFill>
-          <a:blip xmlns:r="http://schemas.openxmlformats.org/officeDocument/2006/relationships">
+          <a:blip xmlns:r="http://schemas.openxmlformats.org/officeDocument/2006/relationships" r:embed="rId5">
             <a:extLst>
               <a:ext uri="{96DAC541-7B7A-43D3-8B79-37D633B846F1}">
-                <asvg:svgBlip xmlns:asvg="http://schemas.microsoft.com/office/drawing/2016/SVG/main" r:embed="rId3"/>
+                <asvg:svgBlip xmlns:asvg="http://schemas.microsoft.com/office/drawing/2016/SVG/main" r:embed="rId6"/>
               </a:ext>
             </a:extLst>
           </a:blip>
@@ -3859,7 +3859,7 @@
   <dgm:whole/>
   <dgm:extLst>
     <a:ext uri="http://schemas.microsoft.com/office/drawing/2008/diagram">
-      <dsp:dataModelExt xmlns:dsp="http://schemas.microsoft.com/office/drawing/2008/diagram" relId="rId8" minVer="http://schemas.openxmlformats.org/drawingml/2006/diagram"/>
+      <dsp:dataModelExt xmlns:dsp="http://schemas.microsoft.com/office/drawing/2008/diagram" relId="rId9" minVer="http://schemas.openxmlformats.org/drawingml/2006/diagram"/>
     </a:ext>
   </dgm:extLst>
 </dgm:dataModel>
@@ -4670,10 +4670,10 @@
           </a:avLst>
         </a:prstGeom>
         <a:blipFill>
-          <a:blip xmlns:r="http://schemas.openxmlformats.org/officeDocument/2006/relationships">
+          <a:blip xmlns:r="http://schemas.openxmlformats.org/officeDocument/2006/relationships" r:embed="rId1">
             <a:extLst>
               <a:ext uri="{96DAC541-7B7A-43D3-8B79-37D633B846F1}">
-                <asvg:svgBlip xmlns:asvg="http://schemas.microsoft.com/office/drawing/2016/SVG/main" r:embed="rId1"/>
+                <asvg:svgBlip xmlns:asvg="http://schemas.microsoft.com/office/drawing/2016/SVG/main" r:embed="rId2"/>
               </a:ext>
             </a:extLst>
           </a:blip>
@@ -4833,10 +4833,10 @@
           </a:avLst>
         </a:prstGeom>
         <a:blipFill>
-          <a:blip xmlns:r="http://schemas.openxmlformats.org/officeDocument/2006/relationships">
+          <a:blip xmlns:r="http://schemas.openxmlformats.org/officeDocument/2006/relationships" r:embed="rId3">
             <a:extLst>
               <a:ext uri="{96DAC541-7B7A-43D3-8B79-37D633B846F1}">
-                <asvg:svgBlip xmlns:asvg="http://schemas.microsoft.com/office/drawing/2016/SVG/main" r:embed="rId2"/>
+                <asvg:svgBlip xmlns:asvg="http://schemas.microsoft.com/office/drawing/2016/SVG/main" r:embed="rId4"/>
               </a:ext>
             </a:extLst>
           </a:blip>
@@ -4996,10 +4996,10 @@
           </a:avLst>
         </a:prstGeom>
         <a:blipFill>
-          <a:blip xmlns:r="http://schemas.openxmlformats.org/officeDocument/2006/relationships">
+          <a:blip xmlns:r="http://schemas.openxmlformats.org/officeDocument/2006/relationships" r:embed="rId5">
             <a:extLst>
               <a:ext uri="{96DAC541-7B7A-43D3-8B79-37D633B846F1}">
-                <asvg:svgBlip xmlns:asvg="http://schemas.microsoft.com/office/drawing/2016/SVG/main" r:embed="rId3"/>
+                <asvg:svgBlip xmlns:asvg="http://schemas.microsoft.com/office/drawing/2016/SVG/main" r:embed="rId6"/>
               </a:ext>
             </a:extLst>
           </a:blip>
@@ -5225,10 +5225,10 @@
           </a:avLst>
         </a:prstGeom>
         <a:blipFill>
-          <a:blip xmlns:r="http://schemas.openxmlformats.org/officeDocument/2006/relationships">
+          <a:blip xmlns:r="http://schemas.openxmlformats.org/officeDocument/2006/relationships" r:embed="rId1">
             <a:extLst>
               <a:ext uri="{96DAC541-7B7A-43D3-8B79-37D633B846F1}">
-                <asvg:svgBlip xmlns:asvg="http://schemas.microsoft.com/office/drawing/2016/SVG/main" r:embed="rId1"/>
+                <asvg:svgBlip xmlns:asvg="http://schemas.microsoft.com/office/drawing/2016/SVG/main" r:embed="rId2"/>
               </a:ext>
             </a:extLst>
           </a:blip>
@@ -5361,10 +5361,10 @@
           </a:avLst>
         </a:prstGeom>
         <a:blipFill>
-          <a:blip xmlns:r="http://schemas.openxmlformats.org/officeDocument/2006/relationships">
+          <a:blip xmlns:r="http://schemas.openxmlformats.org/officeDocument/2006/relationships" r:embed="rId3">
             <a:extLst>
               <a:ext uri="{96DAC541-7B7A-43D3-8B79-37D633B846F1}">
-                <asvg:svgBlip xmlns:asvg="http://schemas.microsoft.com/office/drawing/2016/SVG/main" r:embed="rId2"/>
+                <asvg:svgBlip xmlns:asvg="http://schemas.microsoft.com/office/drawing/2016/SVG/main" r:embed="rId4"/>
               </a:ext>
             </a:extLst>
           </a:blip>
@@ -5497,10 +5497,10 @@
           </a:avLst>
         </a:prstGeom>
         <a:blipFill>
-          <a:blip xmlns:r="http://schemas.openxmlformats.org/officeDocument/2006/relationships">
+          <a:blip xmlns:r="http://schemas.openxmlformats.org/officeDocument/2006/relationships" r:embed="rId5">
             <a:extLst>
               <a:ext uri="{96DAC541-7B7A-43D3-8B79-37D633B846F1}">
-                <asvg:svgBlip xmlns:asvg="http://schemas.microsoft.com/office/drawing/2016/SVG/main" r:embed="rId3"/>
+                <asvg:svgBlip xmlns:asvg="http://schemas.microsoft.com/office/drawing/2016/SVG/main" r:embed="rId6"/>
               </a:ext>
             </a:extLst>
           </a:blip>
@@ -9484,7 +9484,7 @@
           <a:p>
             <a:fld id="{3D94FAE1-E8DC-7E4F-8824-D6A393489AE1}" type="datetimeFigureOut">
               <a:rPr lang="en-TH" smtClean="0"/>
-              <a:t>31/7/2026 R</a:t>
+              <a:t>7/8/2026 R</a:t>
             </a:fld>
             <a:endParaRPr lang="en-TH"/>
           </a:p>
@@ -10773,7 +10773,7 @@
           <a:p>
             <a:fld id="{DAA05DA8-D524-CE4A-B891-6E1FDCF55451}" type="datetime5">
               <a:rPr lang="en-US" smtClean="0"/>
-              <a:t>31-Jul-26</a:t>
+              <a:t>7-Aug-26</a:t>
             </a:fld>
             <a:endParaRPr lang="en-TH"/>
           </a:p>
@@ -10973,7 +10973,7 @@
           <a:p>
             <a:fld id="{EAD17B26-D4A6-FD43-9294-F1E6CDBAC3E3}" type="datetime5">
               <a:rPr lang="en-US" smtClean="0"/>
-              <a:t>31-Jul-26</a:t>
+              <a:t>7-Aug-26</a:t>
             </a:fld>
             <a:endParaRPr lang="en-TH"/>
           </a:p>
@@ -11183,7 +11183,7 @@
           <a:p>
             <a:fld id="{FD746268-285B-5246-9F47-C3506C68394D}" type="datetime5">
               <a:rPr lang="en-US" smtClean="0"/>
-              <a:t>31-Jul-26</a:t>
+              <a:t>7-Aug-26</a:t>
             </a:fld>
             <a:endParaRPr lang="en-TH"/>
           </a:p>
@@ -11418,7 +11418,7 @@
           <a:p>
             <a:fld id="{C125A8C8-41E1-3F49-8157-BA19C856F422}" type="datetime5">
               <a:rPr lang="en-US" smtClean="0"/>
-              <a:t>31-Jul-26</a:t>
+              <a:t>7-Aug-26</a:t>
             </a:fld>
             <a:endParaRPr lang="en-TH"/>
           </a:p>
@@ -11694,7 +11694,7 @@
           <a:p>
             <a:fld id="{6E244ED1-6194-6044-95D9-08F9AF0BB002}" type="datetime5">
               <a:rPr lang="en-US" smtClean="0"/>
-              <a:t>31-Jul-26</a:t>
+              <a:t>7-Aug-26</a:t>
             </a:fld>
             <a:endParaRPr lang="en-TH"/>
           </a:p>
@@ -11962,7 +11962,7 @@
           <a:p>
             <a:fld id="{88957159-C2DA-E847-B63B-0B6A3573D9EE}" type="datetime5">
               <a:rPr lang="en-US" smtClean="0"/>
-              <a:t>31-Jul-26</a:t>
+              <a:t>7-Aug-26</a:t>
             </a:fld>
             <a:endParaRPr lang="en-TH"/>
           </a:p>
@@ -12377,7 +12377,7 @@
           <a:p>
             <a:fld id="{D00EB01A-B309-4C4E-824D-C89DBE72E163}" type="datetime5">
               <a:rPr lang="en-US" smtClean="0"/>
-              <a:t>31-Jul-26</a:t>
+              <a:t>7-Aug-26</a:t>
             </a:fld>
             <a:endParaRPr lang="en-TH"/>
           </a:p>
@@ -12519,7 +12519,7 @@
           <a:p>
             <a:fld id="{21B903EB-DF9E-9845-B604-7AC7E76B8C89}" type="datetime5">
               <a:rPr lang="en-US" smtClean="0"/>
-              <a:t>31-Jul-26</a:t>
+              <a:t>7-Aug-26</a:t>
             </a:fld>
             <a:endParaRPr lang="en-TH"/>
           </a:p>
@@ -12632,7 +12632,7 @@
           <a:p>
             <a:fld id="{0A667FA2-DF18-0240-905A-4390229966F0}" type="datetime5">
               <a:rPr lang="en-US" smtClean="0"/>
-              <a:t>31-Jul-26</a:t>
+              <a:t>7-Aug-26</a:t>
             </a:fld>
             <a:endParaRPr lang="en-TH"/>
           </a:p>
@@ -12945,7 +12945,7 @@
           <a:p>
             <a:fld id="{C0F507D3-FC91-904B-8338-D7041F548BD0}" type="datetime5">
               <a:rPr lang="en-US" smtClean="0"/>
-              <a:t>31-Jul-26</a:t>
+              <a:t>7-Aug-26</a:t>
             </a:fld>
             <a:endParaRPr lang="en-TH"/>
           </a:p>
@@ -13234,7 +13234,7 @@
           <a:p>
             <a:fld id="{0E2F0D3D-E7F5-5847-8C6E-34E2FB05CDEB}" type="datetime5">
               <a:rPr lang="en-US" smtClean="0"/>
-              <a:t>31-Jul-26</a:t>
+              <a:t>7-Aug-26</a:t>
             </a:fld>
             <a:endParaRPr lang="en-TH"/>
           </a:p>
@@ -13477,7 +13477,7 @@
           <a:p>
             <a:fld id="{D28A85D6-0A4F-B045-8123-56B2F1CA6E7B}" type="datetime5">
               <a:rPr lang="en-US" smtClean="0"/>
-              <a:t>31-Jul-26</a:t>
+              <a:t>7-Aug-26</a:t>
             </a:fld>
             <a:endParaRPr lang="en-TH"/>
           </a:p>
@@ -14534,7 +14534,7 @@
           <a:p>
             <a:fld id="{128BA690-362C-854E-857D-6186A02EAD2A}" type="datetime5">
               <a:rPr lang="en-US" smtClean="0"/>
-              <a:t>31-Jul-26</a:t>
+              <a:t>7-Aug-26</a:t>
             </a:fld>
             <a:endParaRPr lang="en-TH"/>
           </a:p>
@@ -14719,7 +14719,7 @@
           <a:p>
             <a:fld id="{049C8197-1826-1140-A5A7-6E043C1C065B}" type="datetime5">
               <a:rPr lang="en-US" smtClean="0"/>
-              <a:t>31-Jul-26</a:t>
+              <a:t>7-Aug-26</a:t>
             </a:fld>
             <a:endParaRPr lang="en-TH"/>
           </a:p>
@@ -14863,7 +14863,7 @@
           <a:p>
             <a:fld id="{51BF4377-FC03-6540-B5A0-2268A66B5E70}" type="datetime5">
               <a:rPr lang="en-US" smtClean="0"/>
-              <a:t>31-Jul-26</a:t>
+              <a:t>7-Aug-26</a:t>
             </a:fld>
             <a:endParaRPr lang="en-TH"/>
           </a:p>
@@ -15060,7 +15060,7 @@
           <a:p>
             <a:fld id="{D81286D0-5AE9-9A43-BA0F-68F64E789304}" type="datetime5">
               <a:rPr lang="en-US" smtClean="0"/>
-              <a:t>31-Jul-26</a:t>
+              <a:t>7-Aug-26</a:t>
             </a:fld>
             <a:endParaRPr lang="en-TH"/>
           </a:p>
@@ -15686,7 +15686,7 @@
           <a:p>
             <a:fld id="{0C969973-5C72-6E49-B464-E3A83DEA07A8}" type="datetime5">
               <a:rPr lang="en-US" smtClean="0"/>
-              <a:t>1-Aug-26</a:t>
+              <a:t>7-Aug-26</a:t>
             </a:fld>
             <a:endParaRPr lang="en-TH"/>
           </a:p>
@@ -16420,7 +16420,7 @@
           <a:p>
             <a:fld id="{61405856-713D-0848-A0CF-DAA5FA96FDAC}" type="datetime5">
               <a:rPr lang="en-US" smtClean="0"/>
-              <a:t>31-Jul-26</a:t>
+              <a:t>7-Aug-26</a:t>
             </a:fld>
             <a:endParaRPr lang="en-TH"/>
           </a:p>
@@ -16662,7 +16662,7 @@
           <a:p>
             <a:fld id="{2ABDDF30-3BD8-AE47-A7CD-1D0B31BCB59B}" type="datetime5">
               <a:rPr lang="en-US" smtClean="0"/>
-              <a:t>31-Jul-26</a:t>
+              <a:t>7-Aug-26</a:t>
             </a:fld>
             <a:endParaRPr lang="en-TH"/>
           </a:p>
@@ -16950,7 +16950,7 @@
           <a:p>
             <a:fld id="{A27EFEB9-165F-FF4A-8488-93DC54076E89}" type="datetime5">
               <a:rPr lang="en-US" smtClean="0"/>
-              <a:t>31-Jul-26</a:t>
+              <a:t>7-Aug-26</a:t>
             </a:fld>
             <a:endParaRPr lang="en-TH"/>
           </a:p>
@@ -17600,10 +17600,10 @@
           <p:nvPr/>
         </p:nvPicPr>
         <p:blipFill>
-          <a:blip>
+          <a:blip r:embed="rId2">
             <a:extLst>
               <a:ext uri="{96DAC541-7B7A-43D3-8B79-37D633B846F1}">
-                <asvg:svgBlip xmlns:asvg="http://schemas.microsoft.com/office/drawing/2016/SVG/main" r:embed="rId2"/>
+                <asvg:svgBlip xmlns:asvg="http://schemas.microsoft.com/office/drawing/2016/SVG/main" r:embed="rId3"/>
               </a:ext>
             </a:extLst>
           </a:blip>
@@ -17769,7 +17769,7 @@
           <a:p>
             <a:fld id="{4B967DE9-3B41-8F48-A944-A2E7E8714E2F}" type="datetime5">
               <a:rPr lang="en-US" smtClean="0"/>
-              <a:t>31-Jul-26</a:t>
+              <a:t>7-Aug-26</a:t>
             </a:fld>
             <a:endParaRPr lang="en-TH"/>
           </a:p>
@@ -18193,7 +18193,7 @@
           <a:p>
             <a:fld id="{93F60EE9-2C29-CA40-B676-15CC1CFE547A}" type="datetime5">
               <a:rPr lang="en-US" smtClean="0"/>
-              <a:t>31-Jul-26</a:t>
+              <a:t>7-Aug-26</a:t>
             </a:fld>
             <a:endParaRPr lang="en-TH"/>
           </a:p>
@@ -18393,7 +18393,14 @@
             <a:pPr algn="ctr"/>
             <a:r>
               <a:rPr lang="en-TH" dirty="0"/>
-              <a:t>Build a Diabetes Risk Scoring System </a:t>
+              <a:t>Build a Diabetes Risk </a:t>
+            </a:r>
+            <a:br>
+              <a:rPr lang="en-TH" dirty="0"/>
+            </a:br>
+            <a:r>
+              <a:rPr lang="en-TH" dirty="0"/>
+              <a:t>Scoring System </a:t>
             </a:r>
             <a:endParaRPr lang="en-US" dirty="0">
               <a:solidFill>
@@ -18498,7 +18505,7 @@
           <a:p>
             <a:fld id="{DB805A4E-ACEF-D348-A5AF-76D0842C49FF}" type="datetime5">
               <a:rPr lang="en-US" smtClean="0"/>
-              <a:t>1-Aug-26</a:t>
+              <a:t>7-Aug-26</a:t>
             </a:fld>
             <a:endParaRPr lang="en-TH"/>
           </a:p>
@@ -18845,7 +18852,7 @@
           <a:p>
             <a:fld id="{1596D758-1C55-8A47-BB85-0B96A633A786}" type="datetime5">
               <a:rPr lang="en-US" smtClean="0"/>
-              <a:t>31-Jul-26</a:t>
+              <a:t>7-Aug-26</a:t>
             </a:fld>
             <a:endParaRPr lang="en-TH"/>
           </a:p>
@@ -19084,7 +19091,7 @@
           <a:p>
             <a:fld id="{118FACC3-9D59-B24B-A7D9-08A7150D1213}" type="datetime5">
               <a:rPr lang="en-US" smtClean="0"/>
-              <a:t>31-Jul-26</a:t>
+              <a:t>7-Aug-26</a:t>
             </a:fld>
             <a:endParaRPr lang="en-TH"/>
           </a:p>
@@ -19866,7 +19873,7 @@
           <a:p>
             <a:fld id="{5D3FF671-393D-8E4C-B942-22BD5A907043}" type="datetime5">
               <a:rPr lang="en-US" smtClean="0"/>
-              <a:t>31-Jul-26</a:t>
+              <a:t>7-Aug-26</a:t>
             </a:fld>
             <a:endParaRPr lang="en-TH"/>
           </a:p>
@@ -20390,7 +20397,7 @@
           <a:p>
             <a:fld id="{C125A8C8-41E1-3F49-8157-BA19C856F422}" type="datetime5">
               <a:rPr lang="en-US" smtClean="0"/>
-              <a:t>31-Jul-26</a:t>
+              <a:t>7-Aug-26</a:t>
             </a:fld>
             <a:endParaRPr lang="en-TH"/>
           </a:p>
@@ -20981,7 +20988,7 @@
           <a:p>
             <a:fld id="{C125A8C8-41E1-3F49-8157-BA19C856F422}" type="datetime5">
               <a:rPr lang="en-US" smtClean="0"/>
-              <a:t>31-Jul-26</a:t>
+              <a:t>7-Aug-26</a:t>
             </a:fld>
             <a:endParaRPr lang="en-TH"/>
           </a:p>
@@ -21784,7 +21791,7 @@
           <a:p>
             <a:fld id="{C125A8C8-41E1-3F49-8157-BA19C856F422}" type="datetime5">
               <a:rPr lang="en-US" smtClean="0"/>
-              <a:t>31-Jul-26</a:t>
+              <a:t>7-Aug-26</a:t>
             </a:fld>
             <a:endParaRPr lang="en-TH"/>
           </a:p>
@@ -21945,7 +21952,7 @@
           <a:p>
             <a:fld id="{C125A8C8-41E1-3F49-8157-BA19C856F422}" type="datetime5">
               <a:rPr lang="en-US" smtClean="0"/>
-              <a:t>31-Jul-26</a:t>
+              <a:t>7-Aug-26</a:t>
             </a:fld>
             <a:endParaRPr lang="en-TH"/>
           </a:p>
@@ -22098,10 +22105,10 @@
           <p:nvPr/>
         </p:nvPicPr>
         <p:blipFill>
-          <a:blip>
+          <a:blip r:embed="rId4">
             <a:extLst>
               <a:ext uri="{96DAC541-7B7A-43D3-8B79-37D633B846F1}">
-                <asvg:svgBlip xmlns:asvg="http://schemas.microsoft.com/office/drawing/2016/SVG/main" r:embed="rId4"/>
+                <asvg:svgBlip xmlns:asvg="http://schemas.microsoft.com/office/drawing/2016/SVG/main" r:embed="rId5"/>
               </a:ext>
             </a:extLst>
           </a:blip>
@@ -22235,7 +22242,7 @@
                 <a:tabLst/>
                 <a:defRPr/>
               </a:pPr>
-              <a:t>31-Jul-26</a:t>
+              <a:t>7-Aug-26</a:t>
             </a:fld>
             <a:endParaRPr kumimoji="0" lang="en-TH" sz="1200" b="0" i="0" u="none" strike="noStrike" kern="1200" cap="none" spc="0" normalizeH="0" baseline="0" noProof="0">
               <a:ln>
@@ -22492,10 +22499,10 @@
           <p:nvPr/>
         </p:nvPicPr>
         <p:blipFill>
-          <a:blip>
+          <a:blip r:embed="rId4">
             <a:extLst>
               <a:ext uri="{96DAC541-7B7A-43D3-8B79-37D633B846F1}">
-                <asvg:svgBlip xmlns:asvg="http://schemas.microsoft.com/office/drawing/2016/SVG/main" r:embed="rId4"/>
+                <asvg:svgBlip xmlns:asvg="http://schemas.microsoft.com/office/drawing/2016/SVG/main" r:embed="rId5"/>
               </a:ext>
             </a:extLst>
           </a:blip>
@@ -22929,7 +22936,7 @@
           <a:p>
             <a:fld id="{801942C5-6C03-E540-B137-26EA799F3E37}" type="datetime5">
               <a:rPr lang="en-US" smtClean="0"/>
-              <a:t>31-Jul-26</a:t>
+              <a:t>7-Aug-26</a:t>
             </a:fld>
             <a:endParaRPr lang="en-TH"/>
           </a:p>
@@ -22979,10 +22986,10 @@
           <p:nvPr/>
         </p:nvPicPr>
         <p:blipFill>
-          <a:blip>
+          <a:blip r:embed="rId2">
             <a:extLst>
               <a:ext uri="{96DAC541-7B7A-43D3-8B79-37D633B846F1}">
-                <asvg:svgBlip xmlns:asvg="http://schemas.microsoft.com/office/drawing/2016/SVG/main" r:embed="rId2"/>
+                <asvg:svgBlip xmlns:asvg="http://schemas.microsoft.com/office/drawing/2016/SVG/main" r:embed="rId3"/>
               </a:ext>
             </a:extLst>
           </a:blip>
@@ -23693,7 +23700,7 @@
           <a:p>
             <a:fld id="{721DDF4D-4288-2748-8EC0-6BF67AA2AD84}" type="datetime5">
               <a:rPr lang="en-US" smtClean="0"/>
-              <a:t>31-Jul-26</a:t>
+              <a:t>7-Aug-26</a:t>
             </a:fld>
             <a:endParaRPr lang="en-TH"/>
           </a:p>
@@ -24433,7 +24440,7 @@
           <a:p>
             <a:fld id="{B27253AE-FBB0-5044-B6C9-162D75F4694D}" type="datetime5">
               <a:rPr lang="en-US" smtClean="0"/>
-              <a:t>1-Aug-26</a:t>
+              <a:t>7-Aug-26</a:t>
             </a:fld>
             <a:endParaRPr lang="en-TH"/>
           </a:p>
@@ -24611,7 +24618,7 @@
           <a:p>
             <a:fld id="{1A1C45A9-CE11-A64B-B2BE-A621D07D8FF2}" type="datetime5">
               <a:rPr lang="en-US" smtClean="0"/>
-              <a:t>31-Jul-26</a:t>
+              <a:t>7-Aug-26</a:t>
             </a:fld>
             <a:endParaRPr lang="en-TH"/>
           </a:p>
@@ -25418,7 +25425,7 @@
           <a:p>
             <a:fld id="{0974C0BC-5418-3B45-B654-F9518862E612}" type="datetime5">
               <a:rPr lang="en-US" smtClean="0"/>
-              <a:t>31-Jul-26</a:t>
+              <a:t>7-Aug-26</a:t>
             </a:fld>
             <a:endParaRPr lang="en-TH"/>
           </a:p>
@@ -25766,7 +25773,7 @@
           <a:p>
             <a:fld id="{0A2B2C85-0F29-8141-824D-B64139D3E644}" type="datetime5">
               <a:rPr lang="en-US" smtClean="0"/>
-              <a:t>31-Jul-26</a:t>
+              <a:t>7-Aug-26</a:t>
             </a:fld>
             <a:endParaRPr lang="en-TH"/>
           </a:p>
@@ -25816,10 +25823,10 @@
           <p:nvPr/>
         </p:nvPicPr>
         <p:blipFill>
-          <a:blip>
+          <a:blip r:embed="rId2">
             <a:extLst>
               <a:ext uri="{96DAC541-7B7A-43D3-8B79-37D633B846F1}">
-                <asvg:svgBlip xmlns:asvg="http://schemas.microsoft.com/office/drawing/2016/SVG/main" r:embed="rId2"/>
+                <asvg:svgBlip xmlns:asvg="http://schemas.microsoft.com/office/drawing/2016/SVG/main" r:embed="rId3"/>
               </a:ext>
             </a:extLst>
           </a:blip>
@@ -26046,7 +26053,7 @@
           <a:p>
             <a:fld id="{A01A5310-2BF5-E94D-8D29-E42AB53A1A8A}" type="datetime5">
               <a:rPr lang="en-US" smtClean="0"/>
-              <a:t>31-Jul-26</a:t>
+              <a:t>7-Aug-26</a:t>
             </a:fld>
             <a:endParaRPr lang="en-TH"/>
           </a:p>
@@ -26286,7 +26293,7 @@
           <a:p>
             <a:fld id="{3C99A2BC-133C-5447-A0CD-89BA58838AD6}" type="datetime5">
               <a:rPr lang="en-US" smtClean="0"/>
-              <a:t>31-Jul-26</a:t>
+              <a:t>7-Aug-26</a:t>
             </a:fld>
             <a:endParaRPr lang="en-TH"/>
           </a:p>
@@ -26468,7 +26475,7 @@
           <a:p>
             <a:fld id="{DA0D2F6F-B8A3-A543-AFF8-39BA7C8BFA72}" type="datetime5">
               <a:rPr lang="en-US" smtClean="0"/>
-              <a:t>31-Jul-26</a:t>
+              <a:t>7-Aug-26</a:t>
             </a:fld>
             <a:endParaRPr lang="en-TH"/>
           </a:p>
@@ -27031,10 +27038,10 @@
           <p:nvPr/>
         </p:nvPicPr>
         <p:blipFill>
-          <a:blip>
+          <a:blip r:embed="rId3">
             <a:extLst>
               <a:ext uri="{96DAC541-7B7A-43D3-8B79-37D633B846F1}">
-                <asvg:svgBlip xmlns:asvg="http://schemas.microsoft.com/office/drawing/2016/SVG/main" r:embed="rId3"/>
+                <asvg:svgBlip xmlns:asvg="http://schemas.microsoft.com/office/drawing/2016/SVG/main" r:embed="rId4"/>
               </a:ext>
             </a:extLst>
           </a:blip>
@@ -27950,10 +27957,10 @@
           <p:nvPr/>
         </p:nvPicPr>
         <p:blipFill>
-          <a:blip>
+          <a:blip r:embed="rId5">
             <a:extLst>
               <a:ext uri="{96DAC541-7B7A-43D3-8B79-37D633B846F1}">
-                <asvg:svgBlip xmlns:asvg="http://schemas.microsoft.com/office/drawing/2016/SVG/main" r:embed="rId4"/>
+                <asvg:svgBlip xmlns:asvg="http://schemas.microsoft.com/office/drawing/2016/SVG/main" r:embed="rId6"/>
               </a:ext>
             </a:extLst>
           </a:blip>
@@ -27986,10 +27993,10 @@
           <p:nvPr/>
         </p:nvPicPr>
         <p:blipFill>
-          <a:blip>
+          <a:blip r:embed="rId7">
             <a:extLst>
               <a:ext uri="{96DAC541-7B7A-43D3-8B79-37D633B846F1}">
-                <asvg:svgBlip xmlns:asvg="http://schemas.microsoft.com/office/drawing/2016/SVG/main" r:embed="rId5"/>
+                <asvg:svgBlip xmlns:asvg="http://schemas.microsoft.com/office/drawing/2016/SVG/main" r:embed="rId8"/>
               </a:ext>
             </a:extLst>
           </a:blip>
@@ -28022,10 +28029,10 @@
           <p:nvPr/>
         </p:nvPicPr>
         <p:blipFill>
-          <a:blip>
+          <a:blip r:embed="rId9">
             <a:extLst>
               <a:ext uri="{96DAC541-7B7A-43D3-8B79-37D633B846F1}">
-                <asvg:svgBlip xmlns:asvg="http://schemas.microsoft.com/office/drawing/2016/SVG/main" r:embed="rId6"/>
+                <asvg:svgBlip xmlns:asvg="http://schemas.microsoft.com/office/drawing/2016/SVG/main" r:embed="rId10"/>
               </a:ext>
             </a:extLst>
           </a:blip>
@@ -28066,7 +28073,7 @@
           <a:p>
             <a:fld id="{DBFA31FC-7BAD-134B-A3C2-C7FB5851CE01}" type="datetime5">
               <a:rPr lang="en-US" smtClean="0"/>
-              <a:t>31-Jul-26</a:t>
+              <a:t>7-Aug-26</a:t>
             </a:fld>
             <a:endParaRPr lang="en-TH"/>
           </a:p>
@@ -28251,7 +28258,7 @@
           <a:p>
             <a:fld id="{0D08CCF7-BE93-E34B-9812-8612FF4EA911}" type="datetime5">
               <a:rPr lang="en-US" smtClean="0"/>
-              <a:t>31-Jul-26</a:t>
+              <a:t>7-Aug-26</a:t>
             </a:fld>
             <a:endParaRPr lang="en-TH"/>
           </a:p>
@@ -28489,7 +28496,7 @@
           <a:p>
             <a:fld id="{30FA1ED7-ED8B-8E45-B575-28074C122089}" type="datetime5">
               <a:rPr lang="en-US" smtClean="0"/>
-              <a:t>31-Jul-26</a:t>
+              <a:t>7-Aug-26</a:t>
             </a:fld>
             <a:endParaRPr lang="en-TH"/>
           </a:p>
@@ -28843,7 +28850,7 @@
           <a:p>
             <a:fld id="{ED4F0C4D-1318-794C-8957-C38E1202F872}" type="datetime5">
               <a:rPr lang="en-US" smtClean="0"/>
-              <a:t>31-Jul-26</a:t>
+              <a:t>7-Aug-26</a:t>
             </a:fld>
             <a:endParaRPr lang="en-TH"/>
           </a:p>
@@ -28893,10 +28900,10 @@
           <p:nvPr/>
         </p:nvPicPr>
         <p:blipFill>
-          <a:blip>
+          <a:blip r:embed="rId3">
             <a:extLst>
               <a:ext uri="{96DAC541-7B7A-43D3-8B79-37D633B846F1}">
-                <asvg:svgBlip xmlns:asvg="http://schemas.microsoft.com/office/drawing/2016/SVG/main" r:embed="rId3"/>
+                <asvg:svgBlip xmlns:asvg="http://schemas.microsoft.com/office/drawing/2016/SVG/main" r:embed="rId4"/>
               </a:ext>
             </a:extLst>
           </a:blip>
@@ -28938,7 +28945,7 @@
         </p:xfrm>
         <a:graphic>
           <a:graphicData uri="http://schemas.openxmlformats.org/drawingml/2006/diagram">
-            <dgm:relIds xmlns:dgm="http://schemas.openxmlformats.org/drawingml/2006/diagram" xmlns:r="http://schemas.openxmlformats.org/officeDocument/2006/relationships" r:dm="rId4" r:lo="rId5" r:qs="rId6" r:cs="rId7"/>
+            <dgm:relIds xmlns:dgm="http://schemas.openxmlformats.org/drawingml/2006/diagram" xmlns:r="http://schemas.openxmlformats.org/officeDocument/2006/relationships" r:dm="rId5" r:lo="rId6" r:qs="rId7" r:cs="rId8"/>
           </a:graphicData>
         </a:graphic>
       </p:graphicFrame>
@@ -28957,7 +28964,7 @@
           <p:nvPr/>
         </p:nvPicPr>
         <p:blipFill>
-          <a:blip r:embed="rId9"/>
+          <a:blip r:embed="rId10"/>
           <a:stretch>
             <a:fillRect/>
           </a:stretch>
@@ -29246,6 +29253,36 @@
           </a:p>
         </p:txBody>
       </p:sp>
+      <p:pic>
+        <p:nvPicPr>
+          <p:cNvPr id="7" name="Picture 6" descr="logo-main-768x200">
+            <a:extLst>
+              <a:ext uri="{FF2B5EF4-FFF2-40B4-BE49-F238E27FC236}">
+                <a16:creationId xmlns:a16="http://schemas.microsoft.com/office/drawing/2014/main" id="{0CC0A30C-CBED-B78F-EA84-8A00CFA02E1B}"/>
+              </a:ext>
+            </a:extLst>
+          </p:cNvPr>
+          <p:cNvPicPr>
+            <a:picLocks noChangeAspect="1"/>
+          </p:cNvPicPr>
+          <p:nvPr/>
+        </p:nvPicPr>
+        <p:blipFill>
+          <a:blip r:embed="rId11"/>
+          <a:stretch>
+            <a:fillRect/>
+          </a:stretch>
+        </p:blipFill>
+        <p:spPr>
+          <a:xfrm>
+            <a:off x="10250831" y="289782"/>
+            <a:ext cx="1469858" cy="378897"/>
+          </a:xfrm>
+          <a:prstGeom prst="rect">
+            <a:avLst/>
+          </a:prstGeom>
+        </p:spPr>
+      </p:pic>
     </p:spTree>
     <p:extLst>
       <p:ext uri="{BB962C8B-B14F-4D97-AF65-F5344CB8AC3E}">
@@ -29457,7 +29494,7 @@
           <a:p>
             <a:fld id="{4C0369BB-EC29-B346-A675-28B9A8180014}" type="datetime5">
               <a:rPr lang="en-US" smtClean="0"/>
-              <a:t>1-Aug-26</a:t>
+              <a:t>7-Aug-26</a:t>
             </a:fld>
             <a:endParaRPr lang="en-TH"/>
           </a:p>
@@ -29545,7 +29582,7 @@
           <a:p>
             <a:fld id="{4C6783B1-58B3-6C48-B896-DAFAECFBF28C}" type="datetime5">
               <a:rPr lang="en-US" smtClean="0"/>
-              <a:t>1-Aug-26</a:t>
+              <a:t>7-Aug-26</a:t>
             </a:fld>
             <a:endParaRPr lang="en-TH"/>
           </a:p>
@@ -31792,7 +31829,7 @@
           <a:p>
             <a:fld id="{BE84D1C2-DEDA-7A41-89F1-5B549FDF1F7E}" type="datetime5">
               <a:rPr lang="en-US" smtClean="0"/>
-              <a:t>1-Aug-26</a:t>
+              <a:t>7-Aug-26</a:t>
             </a:fld>
             <a:endParaRPr lang="en-TH"/>
           </a:p>
@@ -34757,7 +34794,7 @@
           <a:p>
             <a:fld id="{C2B0D90B-6EFE-E046-8F39-1495C1DEF19C}" type="datetime5">
               <a:rPr lang="en-US" smtClean="0"/>
-              <a:t>1-Aug-26</a:t>
+              <a:t>7-Aug-26</a:t>
             </a:fld>
             <a:endParaRPr lang="en-TH"/>
           </a:p>
@@ -36264,10 +36301,10 @@
           <p:nvPr/>
         </p:nvPicPr>
         <p:blipFill>
-          <a:blip>
+          <a:blip r:embed="rId2">
             <a:extLst>
               <a:ext uri="{96DAC541-7B7A-43D3-8B79-37D633B846F1}">
-                <asvg:svgBlip xmlns:asvg="http://schemas.microsoft.com/office/drawing/2016/SVG/main" r:embed="rId2"/>
+                <asvg:svgBlip xmlns:asvg="http://schemas.microsoft.com/office/drawing/2016/SVG/main" r:embed="rId3"/>
               </a:ext>
             </a:extLst>
           </a:blip>
@@ -36349,10 +36386,10 @@
           <p:nvPr/>
         </p:nvPicPr>
         <p:blipFill>
-          <a:blip>
+          <a:blip r:embed="rId2">
             <a:extLst>
               <a:ext uri="{96DAC541-7B7A-43D3-8B79-37D633B846F1}">
-                <asvg:svgBlip xmlns:asvg="http://schemas.microsoft.com/office/drawing/2016/SVG/main" r:embed="rId2"/>
+                <asvg:svgBlip xmlns:asvg="http://schemas.microsoft.com/office/drawing/2016/SVG/main" r:embed="rId3"/>
               </a:ext>
             </a:extLst>
           </a:blip>
@@ -36434,10 +36471,10 @@
           <p:nvPr/>
         </p:nvPicPr>
         <p:blipFill>
-          <a:blip>
+          <a:blip r:embed="rId2">
             <a:extLst>
               <a:ext uri="{96DAC541-7B7A-43D3-8B79-37D633B846F1}">
-                <asvg:svgBlip xmlns:asvg="http://schemas.microsoft.com/office/drawing/2016/SVG/main" r:embed="rId2"/>
+                <asvg:svgBlip xmlns:asvg="http://schemas.microsoft.com/office/drawing/2016/SVG/main" r:embed="rId3"/>
               </a:ext>
             </a:extLst>
           </a:blip>
@@ -36909,7 +36946,7 @@
           <a:p>
             <a:fld id="{8634FB73-7407-0748-BFD3-AF84AFFB1E2B}" type="datetime5">
               <a:rPr lang="en-US" smtClean="0"/>
-              <a:t>1-Aug-26</a:t>
+              <a:t>7-Aug-26</a:t>
             </a:fld>
             <a:endParaRPr lang="en-TH"/>
           </a:p>
@@ -37181,7 +37218,7 @@
           <a:p>
             <a:fld id="{33EF8B4B-1739-904A-ADC0-0D3D3A8B4A14}" type="datetime5">
               <a:rPr lang="en-US" smtClean="0"/>
-              <a:t>1-Aug-26</a:t>
+              <a:t>7-Aug-26</a:t>
             </a:fld>
             <a:endParaRPr lang="en-TH"/>
           </a:p>
